--- a/apps/resources/bundled_files/4-klass-akcha-sabak.pptx
+++ b/apps/resources/bundled_files/4-klass-akcha-sabak.pptx
@@ -5196,7 +5196,7 @@
                 </a:solidFill>
                 <a:latin typeface="PT Sans"/>
               </a:rPr>
-              <a:t>4-класс · Математика</a:t>
+              <a:t/>
             </a:r>
           </a:p>
         </p:txBody>
@@ -5688,7 +5688,7 @@
                 </a:solidFill>
                 <a:latin typeface="PT Sans"/>
               </a:rPr>
-              <a:t>4-класс ›</a:t>
+              <a:t/>
             </a:r>
           </a:p>
           <a:p>
@@ -6637,7 +6637,7 @@
                 </a:solidFill>
                 <a:latin typeface="PT Sans"/>
               </a:rPr>
-              <a:t>4-класс ›</a:t>
+              <a:t/>
             </a:r>
           </a:p>
           <a:p>
@@ -9775,7 +9775,7 @@
                 </a:solidFill>
                 <a:latin typeface="PT Sans"/>
               </a:rPr>
-              <a:t>4-класс ›</a:t>
+              <a:t/>
             </a:r>
           </a:p>
           <a:p>
@@ -12097,7 +12097,7 @@
                 </a:solidFill>
                 <a:latin typeface="PT Sans"/>
               </a:rPr>
-              <a:t>4-класс ›</a:t>
+              <a:t/>
             </a:r>
           </a:p>
           <a:p>
@@ -13680,7 +13680,7 @@
                 </a:solidFill>
                 <a:latin typeface="PT Sans"/>
               </a:rPr>
-              <a:t>4-класс ›</a:t>
+              <a:t/>
             </a:r>
           </a:p>
           <a:p>
@@ -14470,7 +14470,7 @@
                 </a:solidFill>
                 <a:latin typeface="PT Sans"/>
               </a:rPr>
-              <a:t>4-класс ›</a:t>
+              <a:t/>
             </a:r>
           </a:p>
           <a:p>
@@ -15221,7 +15221,7 @@
                 </a:solidFill>
                 <a:latin typeface="PT Sans"/>
               </a:rPr>
-              <a:t>4-класс ›</a:t>
+              <a:t/>
             </a:r>
           </a:p>
           <a:p>
@@ -16848,7 +16848,7 @@
                 </a:solidFill>
                 <a:latin typeface="PT Sans"/>
               </a:rPr>
-              <a:t>4-класс ›</a:t>
+              <a:t/>
             </a:r>
           </a:p>
           <a:p>
@@ -17932,7 +17932,7 @@
                 </a:solidFill>
                 <a:latin typeface="PT Sans"/>
               </a:rPr>
-              <a:t>4-класс ›</a:t>
+              <a:t/>
             </a:r>
           </a:p>
           <a:p>
@@ -19462,7 +19462,7 @@
                 </a:solidFill>
                 <a:latin typeface="PT Sans"/>
               </a:rPr>
-              <a:t>4-класс ›</a:t>
+              <a:t/>
             </a:r>
           </a:p>
           <a:p>
@@ -21353,7 +21353,7 @@
                 </a:solidFill>
                 <a:latin typeface="PT Sans"/>
               </a:rPr>
-              <a:t>4-класс ›</a:t>
+              <a:t/>
             </a:r>
           </a:p>
           <a:p>
@@ -22630,7 +22630,7 @@
                 </a:solidFill>
                 <a:latin typeface="PT Sans"/>
               </a:rPr>
-              <a:t>4-класс ›</a:t>
+              <a:t/>
             </a:r>
           </a:p>
           <a:p>
@@ -24058,7 +24058,7 @@
                 </a:solidFill>
                 <a:latin typeface="PT Sans"/>
               </a:rPr>
-              <a:t>4-класс ›</a:t>
+              <a:t/>
             </a:r>
           </a:p>
           <a:p>
@@ -25514,7 +25514,7 @@
                 </a:solidFill>
                 <a:latin typeface="PT Sans"/>
               </a:rPr>
-              <a:t>4-класс ›</a:t>
+              <a:t/>
             </a:r>
           </a:p>
           <a:p>
@@ -26678,7 +26678,7 @@
                 </a:solidFill>
                 <a:latin typeface="PT Sans"/>
               </a:rPr>
-              <a:t>4-класс ›</a:t>
+              <a:t/>
             </a:r>
           </a:p>
           <a:p>
@@ -27478,7 +27478,7 @@
                 </a:solidFill>
                 <a:latin typeface="PT Sans"/>
               </a:rPr>
-              <a:t>4-класс ›</a:t>
+              <a:t/>
             </a:r>
           </a:p>
           <a:p>
@@ -28319,7 +28319,7 @@
                 </a:solidFill>
                 <a:latin typeface="PT Sans"/>
               </a:rPr>
-              <a:t>4-класс ›</a:t>
+              <a:t/>
             </a:r>
           </a:p>
           <a:p>
@@ -29268,7 +29268,7 @@
                 </a:solidFill>
                 <a:latin typeface="PT Sans"/>
               </a:rPr>
-              <a:t>4-класс ›</a:t>
+              <a:t/>
             </a:r>
           </a:p>
           <a:p>
@@ -30722,7 +30722,7 @@
                 </a:solidFill>
                 <a:latin typeface="PT Sans"/>
               </a:rPr>
-              <a:t>4-класс ›</a:t>
+              <a:t/>
             </a:r>
           </a:p>
           <a:p>
@@ -31468,7 +31468,7 @@
                 </a:solidFill>
                 <a:latin typeface="PT Sans"/>
               </a:rPr>
-              <a:t>4-класс ›</a:t>
+              <a:t/>
             </a:r>
           </a:p>
           <a:p>
@@ -32276,7 +32276,7 @@
                 </a:solidFill>
                 <a:latin typeface="PT Sans"/>
               </a:rPr>
-              <a:t>4-класс ›</a:t>
+              <a:t/>
             </a:r>
           </a:p>
           <a:p>
@@ -33467,7 +33467,7 @@
                 </a:solidFill>
                 <a:latin typeface="PT Sans"/>
               </a:rPr>
-              <a:t>4-класс ›</a:t>
+              <a:t/>
             </a:r>
           </a:p>
           <a:p>
@@ -34646,7 +34646,7 @@
                 </a:solidFill>
                 <a:latin typeface="PT Sans"/>
               </a:rPr>
-              <a:t>4-класс ›</a:t>
+              <a:t/>
             </a:r>
           </a:p>
           <a:p>
@@ -34827,7 +34827,7 @@
                 </a:solidFill>
                 <a:latin typeface="PT Sans"/>
               </a:rPr>
-              <a:t>2-класс</a:t>
+              <a:t/>
             </a:r>
           </a:p>
         </p:txBody>
@@ -35007,7 +35007,7 @@
                 </a:solidFill>
                 <a:latin typeface="PT Sans"/>
               </a:rPr>
-              <a:t>3-класс</a:t>
+              <a:t/>
             </a:r>
           </a:p>
         </p:txBody>
@@ -35187,7 +35187,7 @@
                 </a:solidFill>
                 <a:latin typeface="PT Sans"/>
               </a:rPr>
-              <a:t>4-класс</a:t>
+              <a:t/>
             </a:r>
           </a:p>
         </p:txBody>
@@ -35423,7 +35423,7 @@
                 </a:solidFill>
                 <a:latin typeface="PT Sans"/>
               </a:rPr>
-              <a:t>5-класс</a:t>
+              <a:t/>
             </a:r>
           </a:p>
         </p:txBody>
@@ -35843,7 +35843,7 @@
                 </a:solidFill>
                 <a:latin typeface="PT Sans"/>
               </a:rPr>
-              <a:t>4-класс ›</a:t>
+              <a:t/>
             </a:r>
           </a:p>
           <a:p>
@@ -36991,7 +36991,7 @@
                 </a:solidFill>
                 <a:latin typeface="PT Sans"/>
               </a:rPr>
-              <a:t>4-класс ›</a:t>
+              <a:t/>
             </a:r>
           </a:p>
           <a:p>

--- a/apps/resources/bundled_files/4-klass-akcha-sabak.pptx
+++ b/apps/resources/bundled_files/4-klass-akcha-sabak.pptx
@@ -1582,7 +1582,7 @@
           <a:lstStyle/>
           <a:p>
             <a:r>
-              <a:t>Ой жүгүртүү маданияты (Wenxi Lee, 2.6).</a:t>
+              <a:t>Ой жүгүртүү маданияты (Wenxi Lee, 2,6).</a:t>
             </a:r>
           </a:p>
         </p:txBody>
